--- a/assets/pptx/catalog-681.pptx
+++ b/assets/pptx/catalog-681.pptx
@@ -3253,7 +3253,7 @@
                 <a:ea typeface="Ebrima"/>
                 <a:cs typeface="Ebrima"/>
               </a:rPr>
-              <a:t>ቅንነትህ (3x)</a:t>
+              <a:t>ቅንነትህ 3x</a:t>
             </a:r>
           </a:p>
           <a:p>
@@ -3338,7 +3338,7 @@
                 <a:ea typeface="Ebrima"/>
                 <a:cs typeface="Ebrima"/>
               </a:rPr>
-              <a:t>ክብሩ (3x)</a:t>
+              <a:t>ክብሩ 3x</a:t>
             </a:r>
           </a:p>
           <a:p>
@@ -3392,7 +3392,7 @@
                 <a:ea typeface="Ebrima"/>
                 <a:cs typeface="Ebrima"/>
               </a:rPr>
-              <a:t>ድንቅ ነው (3x)</a:t>
+              <a:t>ድንቅ ነው 3x</a:t>
             </a:r>
           </a:p>
           <a:p>
@@ -3549,7 +3549,7 @@
                 <a:ea typeface="Ebrima"/>
                 <a:cs typeface="Ebrima"/>
               </a:rPr>
-              <a:t>ፊቴ እየቀደመ ኡሁሁ (2x)</a:t>
+              <a:t>ፊቴ እየቀደመ ኡሁሁ 2x</a:t>
             </a:r>
           </a:p>
         </p:txBody>
@@ -3634,7 +3634,7 @@
                 <a:ea typeface="Ebrima"/>
                 <a:cs typeface="Ebrima"/>
               </a:rPr>
-              <a:t>እግዚአብሔርን አይቶ ጠላቴም ፈርቶኛል (2x)</a:t>
+              <a:t>እግዚአብሔርን አይቶ ጠላቴም ፈርቶኛል 2x</a:t>
             </a:r>
           </a:p>
         </p:txBody>
@@ -3701,7 +3701,7 @@
                 <a:ea typeface="Ebrima"/>
                 <a:cs typeface="Ebrima"/>
               </a:rPr>
-              <a:t>ይሄ ነው (5x)</a:t>
+              <a:t>ይሄ ነው 5x</a:t>
             </a:r>
           </a:p>
           <a:p>
@@ -3719,7 +3719,7 @@
                 <a:ea typeface="Ebrima"/>
                 <a:cs typeface="Ebrima"/>
               </a:rPr>
-              <a:t>ጌታ ድል አድራጊው (2x)</a:t>
+              <a:t>ጌታ ድል አድራጊው 2x</a:t>
             </a:r>
           </a:p>
         </p:txBody>
@@ -3786,7 +3786,7 @@
                 <a:ea typeface="Ebrima"/>
                 <a:cs typeface="Ebrima"/>
               </a:rPr>
-              <a:t>በዋጋ ገዛኸኝ እንዳልጠፋ እንዳልሞት (2x)</a:t>
+              <a:t>በዋጋ ገዛኸኝ እንዳልጠፋ እንዳልሞት 2x</a:t>
             </a:r>
           </a:p>
           <a:p>
@@ -3804,7 +3804,7 @@
                 <a:ea typeface="Ebrima"/>
                 <a:cs typeface="Ebrima"/>
               </a:rPr>
-              <a:t>በዋጋ ገዛኸኝ እንዳልጠፋ እንዳልሞት (2x)</a:t>
+              <a:t>በዋጋ ገዛኸኝ እንዳልጠፋ እንዳልሞት 2x</a:t>
             </a:r>
           </a:p>
         </p:txBody>
@@ -3889,7 +3889,7 @@
                 <a:ea typeface="Ebrima"/>
                 <a:cs typeface="Ebrima"/>
               </a:rPr>
-              <a:t>በፊቱ ሞገስ አገኘሁ (2x)</a:t>
+              <a:t>በፊቱ ሞገስ አገኘሁ 2x</a:t>
             </a:r>
           </a:p>
           <a:p>
@@ -3979,7 +3979,7 @@
                 <a:ea typeface="Ebrima"/>
                 <a:cs typeface="Ebrima"/>
               </a:rPr>
-              <a:t>ክብር ለእግዚአብሔር (7x)</a:t>
+              <a:t>ክብር ለእግዚአብሔር 7x</a:t>
             </a:r>
           </a:p>
         </p:txBody>
@@ -4064,7 +4064,7 @@
                 <a:ea typeface="Ebrima"/>
                 <a:cs typeface="Ebrima"/>
               </a:rPr>
-              <a:t>አይደለም በእኔ በእኔ (2x)</a:t>
+              <a:t>አይደለም በእኔ በእኔ 2x</a:t>
             </a:r>
           </a:p>
         </p:txBody>
@@ -4131,7 +4131,7 @@
                 <a:ea typeface="Ebrima"/>
                 <a:cs typeface="Ebrima"/>
               </a:rPr>
-              <a:t>ቅንነትህ (3x)</a:t>
+              <a:t>ቅንነትህ 3x</a:t>
             </a:r>
           </a:p>
           <a:p>
@@ -4355,7 +4355,7 @@
                 <a:ea typeface="Ebrima"/>
                 <a:cs typeface="Ebrima"/>
               </a:rPr>
-              <a:t>ቅንነትህ (3x)</a:t>
+              <a:t>ቅንነትህ 3x</a:t>
             </a:r>
           </a:p>
           <a:p>
@@ -4458,7 +4458,7 @@
                 <a:ea typeface="Ebrima"/>
                 <a:cs typeface="Ebrima"/>
               </a:rPr>
-              <a:t>የብቻዬ ጌታዬ ለእኔ (2x)</a:t>
+              <a:t>የብቻዬ ጌታዬ ለእኔ 2x</a:t>
             </a:r>
           </a:p>
         </p:txBody>
